--- a/interview-slides/pdf/GuangyiLiu-ZJU.pptx
+++ b/interview-slides/pdf/GuangyiLiu-ZJU.pptx
@@ -1395,6 +1395,31 @@
           </a:p>
         </p:txBody>
       </p:sp>
+      <p:sp>
+        <p:nvSpPr>
+          <p:cNvPr id="6" name="文本框 5"/>
+          <p:cNvSpPr txBox="1"/>
+          <p:nvPr userDrawn="1"/>
+        </p:nvSpPr>
+        <p:spPr>
+          <a:xfrm>
+            <a:off x="1813560" y="7075805"/>
+            <a:ext cx="4064000" cy="914400"/>
+          </a:xfrm>
+          <a:prstGeom prst="rect">
+            <a:avLst/>
+          </a:prstGeom>
+        </p:spPr>
+        <p:txBody>
+          <a:bodyPr vert="horz" wrap="square" lIns="91440" tIns="45720" rIns="91440" bIns="45720" rtlCol="0" anchor="ctr">
+            <a:normAutofit/>
+          </a:bodyPr>
+          <a:p>
+            <a:pPr algn="l"/>
+            <a:endParaRPr kumimoji="1" lang="zh-CN" altLang="en-US" dirty="0"/>
+          </a:p>
+        </p:txBody>
+      </p:sp>
     </p:spTree>
   </p:cSld>
   <p:clrMapOvr>
@@ -3208,9 +3233,13 @@
             <a:pPr algn="ctr"/>
             <a:r>
               <a:rPr kumimoji="1" lang="en-US" altLang="zh-CN" sz="1200" dirty="0"/>
-              <a:t>author</a:t>
-            </a:r>
-            <a:endParaRPr kumimoji="1" lang="zh-CN" altLang="en-US" sz="1200" dirty="0"/>
+              <a:t>Guangyi </a:t>
+            </a:r>
+            <a:r>
+              <a:rPr kumimoji="1" lang="en-US" altLang="zh-CN" sz="1200" dirty="0"/>
+              <a:t>Liu</a:t>
+            </a:r>
+            <a:endParaRPr kumimoji="1" lang="en-US" altLang="zh-CN" sz="1200" dirty="0"/>
           </a:p>
         </p:txBody>
       </p:sp>
@@ -3444,8 +3473,8 @@
         </p:nvSpPr>
         <p:spPr>
           <a:xfrm>
-            <a:off x="11353800" y="6637865"/>
-            <a:ext cx="728507" cy="220133"/>
+            <a:off x="11000000" y="6637865"/>
+            <a:ext cx="1082307" cy="220133"/>
           </a:xfrm>
           <a:prstGeom prst="rect">
             <a:avLst/>
@@ -3558,6 +3587,16 @@
                 <a:ea typeface="Hiragino Sans GB W3" panose="020B0300000000000000" pitchFamily="34" charset="-128"/>
               </a:rPr>
             </a:fld>
+            <a:r>
+              <a:rPr lang="en-US" sz="1000" smtClean="0">
+                <a:solidFill>
+                  <a:schemeClr val="bg1"/>
+                </a:solidFill>
+                <a:latin typeface="Hiragino Sans GB W3" panose="020B0300000000000000" pitchFamily="34" charset="-128"/>
+                <a:ea typeface="Hiragino Sans GB W3" panose="020B0300000000000000" pitchFamily="34" charset="-128"/>
+              </a:rPr>
+              <a:t>/10</a:t>
+            </a:r>
             <a:endParaRPr lang="en-US" sz="1000" dirty="0">
               <a:solidFill>
                 <a:schemeClr val="bg1"/>
